--- a/skills/generate-full-report/references/TEMPLATE.pptx
+++ b/skills/generate-full-report/references/TEMPLATE.pptx
@@ -1664,7 +1664,7 @@
                 <a:cs typeface="Malgun Gothic"/>
                 <a:sym typeface="Malgun Gothic"/>
               </a:rPr>
-              <a:t>- Researched, Written, and Created by DONG HYUNG SHIN(donghyung.shin@gmail.com)</a:t>
+              <a:t>- Researched, Written, and Created by {AUTHOR_EN}({EMAIL})</a:t>
             </a:r>
             <a:endParaRPr sz="600">
               <a:solidFill>
@@ -1831,7 +1831,7 @@
                 <a:cs typeface="Malgun Gothic"/>
                 <a:sym typeface="Malgun Gothic"/>
               </a:rPr>
-              <a:t>- Researched, Written, and Created by DONG HYUNG SHIN(donghyung.shin@gmail.com)</a:t>
+              <a:t>- Researched, Written, and Created by {AUTHOR_EN}({EMAIL})</a:t>
             </a:r>
             <a:endParaRPr sz="600">
               <a:solidFill>
@@ -2248,7 +2248,7 @@
                 <a:cs typeface="Malgun Gothic"/>
                 <a:sym typeface="Malgun Gothic"/>
               </a:rPr>
-              <a:t>- Researched, Written, and Created by DONG HYUNG SHIN(donghyung.shin@gmail.com)</a:t>
+              <a:t>- Researched, Written, and Created by {AUTHOR_EN}({EMAIL})</a:t>
             </a:r>
             <a:endParaRPr sz="600">
               <a:solidFill>
@@ -2403,7 +2403,7 @@
                 <a:cs typeface="Malgun Gothic"/>
                 <a:sym typeface="Malgun Gothic"/>
               </a:rPr>
-              <a:t>- Researched, Written, and Created by DONG HYUNG SHIN(donghyung.shin@gmail.com)</a:t>
+              <a:t>- Researched, Written, and Created by {AUTHOR_EN}({EMAIL})</a:t>
             </a:r>
             <a:endParaRPr sz="600">
               <a:solidFill>
@@ -3406,7 +3406,7 @@
                 <a:cs typeface="Malgun Gothic"/>
                 <a:sym typeface="Malgun Gothic"/>
               </a:rPr>
-              <a:t>- Researched, Written, and Created by DONG HYUNG SHIN(donghyung.shin@gmail.com)</a:t>
+              <a:t>- Researched, Written, and Created by {AUTHOR_EN}({EMAIL})</a:t>
             </a:r>
             <a:endParaRPr sz="600">
               <a:solidFill>
@@ -4879,13 +4879,6 @@
                 <a:ea typeface="Jua"/>
                 <a:cs typeface="Jua"/>
                 <a:sym typeface="Jua"/>
-                <a:hlinkClick r:id="rId3">
-                  <a:extLst>
-                    <a:ext uri="{A12FA001-AC4F-418D-AE19-62706E023703}">
-                      <ahyp:hlinkClr val="tx"/>
-                    </a:ext>
-                  </a:extLst>
-                </a:hlinkClick>
               </a:rPr>
               <a:t>신동</a:t>
             </a:r>
@@ -4898,13 +4891,6 @@
                 <a:ea typeface="Jua"/>
                 <a:cs typeface="Jua"/>
                 <a:sym typeface="Jua"/>
-                <a:hlinkClick r:id="rId4">
-                  <a:extLst>
-                    <a:ext uri="{A12FA001-AC4F-418D-AE19-62706E023703}">
-                      <ahyp:hlinkClr val="tx"/>
-                    </a:ext>
-                  </a:extLst>
-                </a:hlinkClick>
               </a:rPr>
               <a:t>형 인사이트</a:t>
             </a:r>
@@ -5683,7 +5669,7 @@
             </a:pPr>
             <a:r>
               <a:rPr lang="en" sz="1600"/>
-              <a:t>신동형</a:t>
+              <a:t>{AUTHOR_KR}</a:t>
             </a:r>
             <a:endParaRPr sz="1600"/>
           </a:p>
@@ -5702,7 +5688,7 @@
             </a:pPr>
             <a:r>
               <a:rPr lang="en" sz="1600"/>
-              <a:t>010-2202-8761</a:t>
+              <a:t>{PHONE_KR}</a:t>
             </a:r>
             <a:endParaRPr sz="1600"/>
           </a:p>
@@ -5721,7 +5707,7 @@
             </a:pPr>
             <a:r>
               <a:rPr lang="en" sz="1600"/>
-              <a:t>donghyung.shin@gmail.com</a:t>
+              <a:t>{EMAIL}</a:t>
             </a:r>
             <a:endParaRPr sz="1600"/>
           </a:p>
